--- a/media/exports/reports/2026-07/calls.pptx
+++ b/media/exports/reports/2026-07/calls.pptx
@@ -235,25 +235,25 @@
                 <c:formatCode>#,##0;[Red](#,##0)</c:formatCode>
                 <c:ptCount val="7"/>
                 <c:pt idx="0">
-                  <c:v>104</c:v>
+                  <c:v>102</c:v>
                 </c:pt>
                 <c:pt idx="1">
-                  <c:v>179</c:v>
+                  <c:v>176</c:v>
                 </c:pt>
                 <c:pt idx="2">
-                  <c:v>130</c:v>
+                  <c:v>149</c:v>
                 </c:pt>
                 <c:pt idx="3">
-                  <c:v>117</c:v>
+                  <c:v>124</c:v>
                 </c:pt>
                 <c:pt idx="4">
-                  <c:v>141</c:v>
+                  <c:v>140</c:v>
                 </c:pt>
                 <c:pt idx="5">
-                  <c:v>119</c:v>
+                  <c:v>120</c:v>
                 </c:pt>
                 <c:pt idx="6">
-                  <c:v>151</c:v>
+                  <c:v>142</c:v>
                 </c:pt>
               </c:numCache>
             </c:numRef>
@@ -317,7 +317,7 @@
       <c:valAx>
         <c:axId val="-2113994440"/>
         <c:scaling>
-          <c:max val="205.85"/>
+          <c:max val="202.39999999999998"/>
           <c:min val="0.0"/>
         </c:scaling>
         <c:delete/>
@@ -477,70 +477,70 @@
                 <c:formatCode>#,##0;[Red](#,##0)</c:formatCode>
                 <c:ptCount val="22"/>
                 <c:pt idx="0">
-                  <c:v>659</c:v>
+                  <c:v>685</c:v>
                 </c:pt>
                 <c:pt idx="1">
-                  <c:v>655</c:v>
+                  <c:v>633</c:v>
                 </c:pt>
                 <c:pt idx="2">
+                  <c:v>684</c:v>
+                </c:pt>
+                <c:pt idx="3">
+                  <c:v>690</c:v>
+                </c:pt>
+                <c:pt idx="4">
+                  <c:v>664</c:v>
+                </c:pt>
+                <c:pt idx="5">
                   <c:v>685</c:v>
                 </c:pt>
-                <c:pt idx="3">
-                  <c:v>714</c:v>
-                </c:pt>
-                <c:pt idx="4">
-                  <c:v>683</c:v>
-                </c:pt>
-                <c:pt idx="5">
-                  <c:v>725</c:v>
-                </c:pt>
                 <c:pt idx="6">
-                  <c:v>620</c:v>
+                  <c:v>629</c:v>
                 </c:pt>
                 <c:pt idx="7">
-                  <c:v>754</c:v>
+                  <c:v>724</c:v>
                 </c:pt>
                 <c:pt idx="8">
-                  <c:v>783</c:v>
+                  <c:v>820</c:v>
                 </c:pt>
                 <c:pt idx="9">
-                  <c:v>871</c:v>
+                  <c:v>909</c:v>
                 </c:pt>
                 <c:pt idx="10">
-                  <c:v>852</c:v>
+                  <c:v>826</c:v>
                 </c:pt>
                 <c:pt idx="11">
-                  <c:v>781</c:v>
+                  <c:v>756</c:v>
                 </c:pt>
                 <c:pt idx="12">
-                  <c:v>792</c:v>
+                  <c:v>770</c:v>
                 </c:pt>
                 <c:pt idx="13">
-                  <c:v>675</c:v>
+                  <c:v>746</c:v>
                 </c:pt>
                 <c:pt idx="14">
-                  <c:v>725</c:v>
+                  <c:v>776</c:v>
                 </c:pt>
                 <c:pt idx="15">
-                  <c:v>756</c:v>
+                  <c:v>726</c:v>
                 </c:pt>
                 <c:pt idx="16">
-                  <c:v>763</c:v>
+                  <c:v>678</c:v>
                 </c:pt>
                 <c:pt idx="17">
-                  <c:v>774</c:v>
+                  <c:v>865</c:v>
                 </c:pt>
                 <c:pt idx="18">
-                  <c:v>751</c:v>
+                  <c:v>731</c:v>
                 </c:pt>
                 <c:pt idx="19">
-                  <c:v>781</c:v>
+                  <c:v>757</c:v>
                 </c:pt>
                 <c:pt idx="20">
-                  <c:v>974</c:v>
+                  <c:v>951</c:v>
                 </c:pt>
                 <c:pt idx="21">
-                  <c:v>941</c:v>
+                  <c:v>953</c:v>
                 </c:pt>
               </c:numCache>
             </c:numRef>
@@ -589,7 +589,7 @@
         <c:axId val="-2100718248"/>
         <c:scaling>
           <c:orientation val="minMax"/>
-          <c:max val="1200.0"/>
+          <c:max val="1000.0"/>
           <c:min val="0.0"/>
         </c:scaling>
         <c:delete val="0"/>
@@ -1114,7 +1114,7 @@
           <a:lstStyle/>
           <a:p>
             <a:r>
-              <a:t>When do calls for help come in, and are we there to answer?. Calls for help, July: 941; Answered while staffed, July: 79.4%; Calls outside staffed hours, July: 52.0%; Median wait when answered, July: 85 sec. 941 calls for help came in during July. While the line was staffed, 79.4% were answered (target 90.0%); 52.0% of all calls came outside staffed hours and went to voicemail. The busiest time was 5 to 8pm (179 calls). 179 calls came between 5 and 8pm, when no-one is on the line. 93 callers hung up waiting while the line was staffed.</a:t>
+              <a:t>When do calls for help come in, and are we there to answer?. Calls for help, July: 953; Answered while staffed, July: 79.0%; Calls outside staffed hours, July: 49.0%; Median wait when answered, July: 89 sec. 953 calls for help came in during July. While the line was staffed, 79.0% were answered (target 90.0%); 49.0% of all calls came outside staffed hours and went to voicemail. The busiest time was 5 to 8pm (176 calls). 176 calls came between 5 and 8pm, when no-one is on the line. 102 callers hung up waiting while the line was staffed.</a:t>
             </a:r>
           </a:p>
         </p:txBody>
@@ -4599,7 +4599,7 @@
                 </a:solidFill>
                 <a:latin typeface="Roboto"/>
               </a:rPr>
-              <a:t>Data retrieved 2pm, Tue 6 Oct 2026 · Generated 8 Oct 2026, 6:42pm · Sample data · Made with Python (python-pptx)</a:t>
+              <a:t>Data retrieved 2pm, Tue 6 Oct 2026 · Generated 8 Oct 2026, 11:41pm · Sample data · Made with Python (python-pptx)</a:t>
             </a:r>
           </a:p>
         </p:txBody>
@@ -4945,7 +4945,7 @@
                 </a:solidFill>
                 <a:latin typeface="Roboto"/>
               </a:rPr>
-              <a:t>941</a:t>
+              <a:t>953</a:t>
             </a:r>
           </a:p>
         </p:txBody>
@@ -4984,7 +4984,7 @@
                 </a:solidFill>
                 <a:latin typeface="Roboto"/>
               </a:rPr>
-              <a:t>June 974</a:t>
+              <a:t>June 951</a:t>
             </a:r>
           </a:p>
         </p:txBody>
@@ -5111,7 +5111,7 @@
                 </a:solidFill>
                 <a:latin typeface="Roboto"/>
               </a:rPr>
-              <a:t>79.4%</a:t>
+              <a:t>79.0%</a:t>
             </a:r>
           </a:p>
         </p:txBody>
@@ -5277,7 +5277,7 @@
                 </a:solidFill>
                 <a:latin typeface="Roboto"/>
               </a:rPr>
-              <a:t>52.0%</a:t>
+              <a:t>49.0%</a:t>
             </a:r>
           </a:p>
         </p:txBody>
@@ -5316,7 +5316,7 @@
                 </a:solidFill>
                 <a:latin typeface="Roboto"/>
               </a:rPr>
-              <a:t>489 calls to voicemail</a:t>
+              <a:t>467 calls to voicemail</a:t>
             </a:r>
           </a:p>
         </p:txBody>
@@ -5443,7 +5443,7 @@
                 </a:solidFill>
                 <a:latin typeface="Roboto"/>
               </a:rPr>
-              <a:t>85 sec</a:t>
+              <a:t>89 sec</a:t>
             </a:r>
           </a:p>
         </p:txBody>
@@ -5482,7 +5482,7 @@
                 </a:solidFill>
                 <a:latin typeface="Roboto"/>
               </a:rPr>
-              <a:t>359 answered calls</a:t>
+              <a:t>384 answered calls</a:t>
             </a:r>
           </a:p>
         </p:txBody>
@@ -5627,7 +5627,7 @@
                 </a:solidFill>
                 <a:latin typeface="Roboto"/>
               </a:rPr>
-              <a:t>941 calls for help came in during July. While the line was staffed, 79.4% were answered (target 90.0%); 52.0% of all calls came outside staffed hours and went to voicemail. The busiest time was 5 to 8pm (179 calls).</a:t>
+              <a:t>953 calls for help came in during July. While the line was staffed, 79.0% were answered (target 90.0%); 49.0% of all calls came outside staffed hours and went to voicemail. The busiest time was 5 to 8pm (176 calls).</a:t>
             </a:r>
           </a:p>
         </p:txBody>
@@ -5754,7 +5754,7 @@
                 </a:solidFill>
                 <a:latin typeface="Roboto"/>
               </a:rPr>
-              <a:t>179 calls came between 5 and 8pm, when no-one is on the line. 93 callers hung up waiting while the line was staffed.</a:t>
+              <a:t>176 calls came between 5 and 8pm, when no-one is on the line. 102 callers hung up waiting while the line was staffed.</a:t>
             </a:r>
           </a:p>
         </p:txBody>
@@ -5832,7 +5832,7 @@
                 </a:solidFill>
                 <a:latin typeface="Roboto"/>
               </a:rPr>
-              <a:t>Data retrieved 2pm, Tue 6 Oct 2026 · Generated 8 Oct 2026, 6:42pm · Sample data · Made with Python (python-pptx)</a:t>
+              <a:t>Data retrieved 2pm, Tue 6 Oct 2026 · Generated 8 Oct 2026, 11:41pm · Sample data · Made with Python (python-pptx)</a:t>
             </a:r>
           </a:p>
         </p:txBody>
@@ -6147,7 +6147,7 @@
                 </a:solidFill>
                 <a:latin typeface="Roboto"/>
               </a:rPr>
-              <a:t>Data retrieved 2pm, Tue 6 Oct 2026 · Generated 8 Oct 2026, 6:42pm · Sample data · Made with Python (python-pptx)</a:t>
+              <a:t>Data retrieved 2pm, Tue 6 Oct 2026 · Generated 8 Oct 2026, 11:41pm · Sample data · Made with Python (python-pptx)</a:t>
             </a:r>
           </a:p>
         </p:txBody>

--- a/media/exports/reports/2026-07/calls.pptx
+++ b/media/exports/reports/2026-07/calls.pptx
@@ -1044,7 +1044,7 @@
           <a:lstStyle/>
           <a:p>
             <a:r>
-              <a:t>When do calls for help come in, and are we there to answer?. Sample Community Services Ltd. Period: July 2026. Every call to the help line: when it came in, whether someone answered, and how long the caller waited. The line is staffed 8:30am to 5pm on working days.</a:t>
+              <a:t>When do calls for help come in, and are we there to answer?. Sample Community Services Ltd. Period: July 2026. In short: 953 calls in July: 79.0% answered while staffed (target 90.0%); 49.0% came outside staffed hours. Every call to the help line: when it came in, whether someone answered, and how long the caller waited. The line is staffed 8:30am to 5pm on working days.</a:t>
             </a:r>
           </a:p>
         </p:txBody>
@@ -4409,7 +4409,7 @@
         <p:spPr>
           <a:xfrm>
             <a:off x="457200" y="3703320"/>
-            <a:ext cx="11277295" cy="535940"/>
+            <a:ext cx="11277295" cy="758190"/>
           </a:xfrm>
           <a:prstGeom prst="rect">
             <a:avLst/>
@@ -4434,7 +4434,7 @@
                 </a:solidFill>
                 <a:latin typeface="Roboto"/>
               </a:rPr>
-              <a:t>Period: July 2026. Every call to the help line: when it came in, whether someone answered, and how long the caller waited. The line is staffed 8:30am to 5pm on working days.</a:t>
+              <a:t>Period: July 2026. In short: 953 calls in July: 79.0% answered while staffed (target 90.0%); 49.0% came outside staffed hours. Every call to the help line: when it came in, whether someone answered, and how long the caller waited. The line is staffed 8:30am to 5pm on working days.</a:t>
             </a:r>
           </a:p>
         </p:txBody>
@@ -4447,7 +4447,7 @@
         </p:nvSpPr>
         <p:spPr>
           <a:xfrm>
-            <a:off x="457200" y="4330700"/>
+            <a:off x="457200" y="4552950"/>
             <a:ext cx="11277295" cy="1097280"/>
           </a:xfrm>
           <a:prstGeom prst="rect">
@@ -4599,7 +4599,7 @@
                 </a:solidFill>
                 <a:latin typeface="Roboto"/>
               </a:rPr>
-              <a:t>Data retrieved 2pm, Tue 6 Oct 2026 · Generated 8 Oct 2026, 11:41pm · Sample data · Made with Python (python-pptx)</a:t>
+              <a:t>Data retrieved 2pm, Tue 6 Oct 2026 · Generated 10 Oct 2026, 9:55pm · Sample data · Made with Python (python-pptx)</a:t>
             </a:r>
           </a:p>
         </p:txBody>
@@ -5832,7 +5832,7 @@
                 </a:solidFill>
                 <a:latin typeface="Roboto"/>
               </a:rPr>
-              <a:t>Data retrieved 2pm, Tue 6 Oct 2026 · Generated 8 Oct 2026, 11:41pm · Sample data · Made with Python (python-pptx)</a:t>
+              <a:t>Data retrieved 2pm, Tue 6 Oct 2026 · Generated 10 Oct 2026, 9:55pm · Sample data · Made with Python (python-pptx)</a:t>
             </a:r>
           </a:p>
         </p:txBody>
@@ -6147,7 +6147,7 @@
                 </a:solidFill>
                 <a:latin typeface="Roboto"/>
               </a:rPr>
-              <a:t>Data retrieved 2pm, Tue 6 Oct 2026 · Generated 8 Oct 2026, 11:41pm · Sample data · Made with Python (python-pptx)</a:t>
+              <a:t>Data retrieved 2pm, Tue 6 Oct 2026 · Generated 10 Oct 2026, 9:55pm · Sample data · Made with Python (python-pptx)</a:t>
             </a:r>
           </a:p>
         </p:txBody>
